--- a/산출물/교재/PPTX/실전반_온라인/실전반_08일차.pptx
+++ b/산출물/교재/PPTX/실전반_온라인/실전반_08일차.pptx
@@ -565,7 +565,7 @@
           <a:lstStyle/>
           <a:p>
             <a:r>
-              <a:t>안녕하세요. 이번 회차에서는 이 과정을 마무리합니다. 지금까지 쿨러 사건 하나를 붙잡고 세 영역을 나눠서 배웠죠. 판단의 재료가 되는 지식, 그 지식을 읽어서 추천안을 만드는 에이전트, 그리고 그 추천안을 사람의 승인과 시스템 실행으로 잇는 프로세스였어요. 사건을 한번 떠올려 볼까요? 쿨러에 이상이 생겨서 경보가 울렸고요, 에이전트가 원인을 가려서 조치를 추천했습니다. 운전원이 승인하자 시스템이 팬 속도를 올렸죠. 그런데 이 한 건 안에서 세 영역은 서로 무엇을 주고받았을까요? 그리고 이 구조를 쿨러가 아닌 내 업무에도 똑같이 세울 수 있을까요? 이번 회차에서는 먼저 쿨러 사건 한 건 위에서 세 영역이 주고받는 걸 되짚어 보고요, 그다음에 같은 구조를 강사가 고른 작은 업무로 직접 만들어 봅니다. 마지막으로 실제 제품에서도 그 구조를 확인해 보겠습니다.</a:t>
+              <a:t>안녕하세요. 이번 회차에서는 이 과정을 마무리합니다. 지금까지 쿨러 사건 하나를 붙잡고 세 영역을 나눠서 배웠죠. 판단의 재료가 되는 지식, 그 지식을 읽어서 추천안을 만드는 에이전트, 그리고 그 추천안을 사람의 승인과 시스템 실행으로 잇는 프로세스였어요. 사건을 한번 떠올려 볼까요? 쿨러에 이상이 생겨서 경보가 울렸고요, 에이전트가 원인을 가려서 조치를 추천했습니다. 운전원이 승인하자 시스템이 팬 속도를 올렸죠. 그런데 이 한 건 안에서 세 영역은 서로 무엇을 주고받았을까요? 그리고 이 구조를 쿨러가 아닌 내 업무에도 똑같이 세울 수 있을까요? 이번 회차에서는 먼저 쿨러 사건 한 건 위에서 세 영역이 주고받는 걸 되짚어 보고요, 그다음에 같은 구조로 생산·정비 조율 업무를 직접 만들어 보겠습니다. 마지막으로 실제 제품에서도 그 구조를 확인해 보겠습니다.</a:t>
             </a:r>
           </a:p>
         </p:txBody>
@@ -3225,7 +3225,7 @@
           <a:lstStyle/>
           <a:p>
             <a:r>
-              <a:t>네 번째 실습은 직접 그린 흐름으로 에이전트를 실행하는 일입니다. 앞 실습에서 만들 에이전트는 제안이나 보류 한 건을 내는 데서 멈춥니다. 쿨러 사건에서도 에이전트의 일은 추천안을 제출하면서 끝났고, 그 뒤를 이은 건 프로세스였죠. 내 업무도 마찬가지예요. 에이전트가 낸 제안이나 보류를 누가 확인하고 어떻게 끝낼지는 흐름이 정합니다. 작은 업무의 흐름은 bpmn.io로 그리고요, 화면의 다섯 칸, 시작, 에이전트 작업, 필요한 자리의 사람 확인, 결과 보고, 종료입니다. 그린 흐름을 준비된 연결 방식의 범위에서 등록하고 실행하면, 앞에서 만든 에이전트가 그 단계에서 일하고 처리 건 하나가 기록으로 남아요. 등록된 흐름과 그 처리 건의 기록이 이 실습에서 남는 것입니다. 이때 지킬 게 하나 있습니다. 일정 등록이나 메일 발송처럼 준비된 범위 밖의 외부 시스템 쓰기는 성공한 것처럼 적지 않아요. 하지 못한 일로 결과 보고에 남깁니다. 처리 건이 끝 이벤트에 닿아 닫히고, 사람 확인이 필요한 자리에 실제로 있었고, 결과 보고에 한 일과 하지 못한 일이 함께 남았으면 성공이에요. 단, 등록할 수 있는 연결이 먼저 준비돼 있어야 합니다. 수업 예제에는 강사가 실제 도구와 결과 형식에 맞게 채울 자리도 있어요. 연결이 없는 기능을 성공으로 꾸미지 말고, 확인 가능한 범위와 막힌 이유를 결과로 남겨야 합니다.</a:t>
+              <a:t>네 번째 실습은 직접 그린 흐름으로 에이전트를 실행하는 일입니다. 앞 실습에서 만들 에이전트는 제안이나 보류 한 건을 내는 데서 멈춥니다. 쿨러 사건에서도 에이전트의 일은 추천안을 제출하면서 끝났고, 그 뒤를 이은 건 프로세스였죠. 내 업무도 마찬가지예요. 에이전트가 낸 제안이나 보류를 누가 확인하고 어떻게 끝낼지는 흐름이 정합니다. 작은 업무의 흐름은 bpmn.io로 그리고요, 화면의 다섯 칸, 시작, 에이전트 작업, 필요한 자리의 사람 확인, 결과 보고, 종료입니다. 그린 흐름을 준비된 연결 방식의 범위에서 등록하고 실행하면, 앞에서 만든 에이전트가 그 단계에서 일하고 처리 건 하나가 기록으로 남아요. 등록된 흐름과 그 처리 건의 기록이 이 실습에서 남는 것입니다. 이때 지킬 게 하나 있습니다. 일정 등록이나 메일 발송처럼 준비된 범위 밖의 외부 시스템 쓰기는 성공한 것처럼 적지 않아요. 하지 못한 일로 결과 보고에 남깁니다. 처리 건이 끝 이벤트에 닿아 닫히고, 사람 확인이 필요한 자리에 실제로 있었고, 결과 보고에 한 일과 하지 못한 일이 함께 남았으면 성공이에요. 단, 등록할 수 있는 연결이 먼저 준비돼 있어야 합니다. 수업 예제에는 제가 실제 도구와 결과 형식에 맞게 채울 자리도 있어요. 연결이 없는 기능을 성공으로 꾸미지 말고, 확인 가능한 범위와 막힌 이유를 결과로 남겨야 합니다.</a:t>
             </a:r>
           </a:p>
         </p:txBody>
